--- a/koreatech-db/theory/이론2장_데이터베이스와_DBMS.pptx
+++ b/koreatech-db/theory/이론2장_데이터베이스와_DBMS.pptx
@@ -3930,9 +3930,9 @@
                 <a:solidFill>
                   <a:srgbClr val="7A869C"/>
                 </a:solidFill>
-                <a:latin typeface="나눔고딕코딩"/>
-                <a:ea typeface="나눔고딕코딩"/>
-                <a:cs typeface="나눔고딕코딩"/>
+                <a:latin typeface="D2Coding"/>
+                <a:ea typeface="D2Coding"/>
+                <a:cs typeface="D2Coding"/>
               </a:rPr>
               <a:t>1</a:t>
             </a:r>
@@ -3948,9 +3948,9 @@
                 <a:solidFill>
                   <a:srgbClr val="7A869C"/>
                 </a:solidFill>
-                <a:latin typeface="나눔고딕코딩"/>
-                <a:ea typeface="나눔고딕코딩"/>
-                <a:cs typeface="나눔고딕코딩"/>
+                <a:latin typeface="D2Coding"/>
+                <a:ea typeface="D2Coding"/>
+                <a:cs typeface="D2Coding"/>
               </a:rPr>
               <a:t>2</a:t>
             </a:r>
@@ -3966,9 +3966,9 @@
                 <a:solidFill>
                   <a:srgbClr val="7A869C"/>
                 </a:solidFill>
-                <a:latin typeface="나눔고딕코딩"/>
-                <a:ea typeface="나눔고딕코딩"/>
-                <a:cs typeface="나눔고딕코딩"/>
+                <a:latin typeface="D2Coding"/>
+                <a:ea typeface="D2Coding"/>
+                <a:cs typeface="D2Coding"/>
               </a:rPr>
               <a:t>3</a:t>
             </a:r>
@@ -3984,9 +3984,9 @@
                 <a:solidFill>
                   <a:srgbClr val="7A869C"/>
                 </a:solidFill>
-                <a:latin typeface="나눔고딕코딩"/>
-                <a:ea typeface="나눔고딕코딩"/>
-                <a:cs typeface="나눔고딕코딩"/>
+                <a:latin typeface="D2Coding"/>
+                <a:ea typeface="D2Coding"/>
+                <a:cs typeface="D2Coding"/>
               </a:rPr>
               <a:t>4</a:t>
             </a:r>
@@ -4002,9 +4002,9 @@
                 <a:solidFill>
                   <a:srgbClr val="7A869C"/>
                 </a:solidFill>
-                <a:latin typeface="나눔고딕코딩"/>
-                <a:ea typeface="나눔고딕코딩"/>
-                <a:cs typeface="나눔고딕코딩"/>
+                <a:latin typeface="D2Coding"/>
+                <a:ea typeface="D2Coding"/>
+                <a:cs typeface="D2Coding"/>
               </a:rPr>
               <a:t>5</a:t>
             </a:r>
@@ -4020,9 +4020,9 @@
                 <a:solidFill>
                   <a:srgbClr val="7A869C"/>
                 </a:solidFill>
-                <a:latin typeface="나눔고딕코딩"/>
-                <a:ea typeface="나눔고딕코딩"/>
-                <a:cs typeface="나눔고딕코딩"/>
+                <a:latin typeface="D2Coding"/>
+                <a:ea typeface="D2Coding"/>
+                <a:cs typeface="D2Coding"/>
               </a:rPr>
               <a:t>6</a:t>
             </a:r>
@@ -4038,9 +4038,9 @@
                 <a:solidFill>
                   <a:srgbClr val="7A869C"/>
                 </a:solidFill>
-                <a:latin typeface="나눔고딕코딩"/>
-                <a:ea typeface="나눔고딕코딩"/>
-                <a:cs typeface="나눔고딕코딩"/>
+                <a:latin typeface="D2Coding"/>
+                <a:ea typeface="D2Coding"/>
+                <a:cs typeface="D2Coding"/>
               </a:rPr>
               <a:t>7</a:t>
             </a:r>
@@ -4056,9 +4056,9 @@
                 <a:solidFill>
                   <a:srgbClr val="7A869C"/>
                 </a:solidFill>
-                <a:latin typeface="나눔고딕코딩"/>
-                <a:ea typeface="나눔고딕코딩"/>
-                <a:cs typeface="나눔고딕코딩"/>
+                <a:latin typeface="D2Coding"/>
+                <a:ea typeface="D2Coding"/>
+                <a:cs typeface="D2Coding"/>
               </a:rPr>
               <a:t>8</a:t>
             </a:r>
@@ -4097,9 +4097,9 @@
                 <a:solidFill>
                   <a:srgbClr val="E6EAF2"/>
                 </a:solidFill>
-                <a:latin typeface="나눔고딕코딩"/>
-                <a:ea typeface="나눔고딕코딩"/>
-                <a:cs typeface="나눔고딕코딩"/>
+                <a:latin typeface="D2Coding"/>
+                <a:ea typeface="D2Coding"/>
+                <a:cs typeface="D2Coding"/>
               </a:rPr>
               <a:t>-- 정의(DDL): 고객 테이블의 구조를 만든다</a:t>
             </a:r>
@@ -4115,9 +4115,9 @@
                 <a:solidFill>
                   <a:srgbClr val="E6EAF2"/>
                 </a:solidFill>
-                <a:latin typeface="나눔고딕코딩"/>
-                <a:ea typeface="나눔고딕코딩"/>
-                <a:cs typeface="나눔고딕코딩"/>
+                <a:latin typeface="D2Coding"/>
+                <a:ea typeface="D2Coding"/>
+                <a:cs typeface="D2Coding"/>
               </a:rPr>
               <a:t>CREATE TABLE customers ( cust_id CHAR(4) PRIMARY KEY, ... );</a:t>
             </a:r>
@@ -4133,9 +4133,9 @@
                 <a:solidFill>
                   <a:srgbClr val="E6EAF2"/>
                 </a:solidFill>
-                <a:latin typeface="나눔고딕코딩"/>
-                <a:ea typeface="나눔고딕코딩"/>
-                <a:cs typeface="나눔고딕코딩"/>
+                <a:latin typeface="D2Coding"/>
+                <a:ea typeface="D2Coding"/>
+                <a:cs typeface="D2Coding"/>
               </a:rPr>
               <a:t/>
             </a:r>
@@ -4151,9 +4151,9 @@
                 <a:solidFill>
                   <a:srgbClr val="E6EAF2"/>
                 </a:solidFill>
-                <a:latin typeface="나눔고딕코딩"/>
-                <a:ea typeface="나눔고딕코딩"/>
-                <a:cs typeface="나눔고딕코딩"/>
+                <a:latin typeface="D2Coding"/>
+                <a:ea typeface="D2Coding"/>
+                <a:cs typeface="D2Coding"/>
               </a:rPr>
               <a:t>-- 조작(DML): VIP 고객을 조회한다</a:t>
             </a:r>
@@ -4169,9 +4169,9 @@
                 <a:solidFill>
                   <a:srgbClr val="E6EAF2"/>
                 </a:solidFill>
-                <a:latin typeface="나눔고딕코딩"/>
-                <a:ea typeface="나눔고딕코딩"/>
-                <a:cs typeface="나눔고딕코딩"/>
+                <a:latin typeface="D2Coding"/>
+                <a:ea typeface="D2Coding"/>
+                <a:cs typeface="D2Coding"/>
               </a:rPr>
               <a:t>SELECT name, points FROM customers WHERE grade = 'VIP';</a:t>
             </a:r>
@@ -4187,9 +4187,9 @@
                 <a:solidFill>
                   <a:srgbClr val="E6EAF2"/>
                 </a:solidFill>
-                <a:latin typeface="나눔고딕코딩"/>
-                <a:ea typeface="나눔고딕코딩"/>
-                <a:cs typeface="나눔고딕코딩"/>
+                <a:latin typeface="D2Coding"/>
+                <a:ea typeface="D2Coding"/>
+                <a:cs typeface="D2Coding"/>
               </a:rPr>
               <a:t/>
             </a:r>
@@ -4205,9 +4205,9 @@
                 <a:solidFill>
                   <a:srgbClr val="E6EAF2"/>
                 </a:solidFill>
-                <a:latin typeface="나눔고딕코딩"/>
-                <a:ea typeface="나눔고딕코딩"/>
-                <a:cs typeface="나눔고딕코딩"/>
+                <a:latin typeface="D2Coding"/>
+                <a:ea typeface="D2Coding"/>
+                <a:cs typeface="D2Coding"/>
               </a:rPr>
               <a:t>-- 제어(DCL): 마케팅팀 계정에 고객 조회 권한만 준다</a:t>
             </a:r>
@@ -4223,9 +4223,9 @@
                 <a:solidFill>
                   <a:srgbClr val="E6EAF2"/>
                 </a:solidFill>
-                <a:latin typeface="나눔고딕코딩"/>
-                <a:ea typeface="나눔고딕코딩"/>
-                <a:cs typeface="나눔고딕코딩"/>
+                <a:latin typeface="D2Coding"/>
+                <a:ea typeface="D2Coding"/>
+                <a:cs typeface="D2Coding"/>
               </a:rPr>
               <a:t>GRANT SELECT ON daon.customers TO 'marketing'@'%';</a:t>
             </a:r>
